--- a/08_cnn/excel_cnn_slides.pptx
+++ b/08_cnn/excel_cnn_slides.pptx
@@ -3278,16 +3278,8 @@
           </a:bodyPr>
           <a:lstStyle/>
           <a:p>
-            <a:pPr algn="l">
-              <a:defRPr sz="1500" b="1">
-                <a:solidFill>
-                  <a:srgbClr val="475569"/>
-                </a:solidFill>
-                <a:latin typeface="Yu Gothic"/>
-              </a:defRPr>
-            </a:pPr>
-            <a:r>
-              <a:t>小さな画像行列から特徴マップを作る</a:t>
+            <a:r>
+              <a:t>paddingとstrideで特徴マップが変わることを見る</a:t>
             </a:r>
           </a:p>
         </p:txBody>
@@ -4905,24 +4897,16 @@
           <a:bodyPr rtlCol="0" anchor="ctr" wrap="square" bIns="36576"/>
           <a:lstStyle/>
           <a:p>
-            <a:pPr algn="ctr">
-              <a:defRPr sz="1700" b="1">
-                <a:solidFill>
-                  <a:srgbClr val="276749"/>
-                </a:solidFill>
-                <a:latin typeface="Yu Gothic"/>
-              </a:defRPr>
-            </a:pPr>
-            <a:r>
-              <a:t>まずは</a:t>
+            <a:r>
+              <a:t>featureとwindowを</a:t>
             </a:r>
             <a:br/>
             <a:r>
-              <a:t>基本の表</a:t>
+              <a:t>切り替えて</a:t>
             </a:r>
             <a:br/>
             <a:r>
-              <a:t>から読む</a:t>
+              <a:t>窓を見る</a:t>
             </a:r>
           </a:p>
         </p:txBody>
@@ -5378,20 +5362,12 @@
           <a:bodyPr rtlCol="0" anchor="ctr" wrap="square" bIns="36576"/>
           <a:lstStyle/>
           <a:p>
-            <a:pPr algn="ctr">
-              <a:defRPr sz="1700" b="1">
-                <a:solidFill>
-                  <a:srgbClr val="2F6690"/>
-                </a:solidFill>
-                <a:latin typeface="Yu Gothic"/>
-              </a:defRPr>
-            </a:pPr>
-            <a:r>
-              <a:t>列名を</a:t>
+            <a:r>
+              <a:t>out_row/out_colと</a:t>
             </a:r>
             <a:br/>
             <a:r>
-              <a:t>計算の役割に</a:t>
+              <a:t>window_sum_productを</a:t>
             </a:r>
             <a:br/>
             <a:r>
@@ -5851,24 +5827,16 @@
           <a:bodyPr rtlCol="0" anchor="ctr" wrap="square" bIns="36576"/>
           <a:lstStyle/>
           <a:p>
-            <a:pPr algn="ctr">
-              <a:defRPr sz="1700" b="1">
-                <a:solidFill>
-                  <a:srgbClr val="276749"/>
-                </a:solidFill>
-                <a:latin typeface="Yu Gothic"/>
-              </a:defRPr>
-            </a:pPr>
-            <a:r>
-              <a:t>設定を変えたら</a:t>
+            <a:r>
+              <a:t>strideやpaddingで</a:t>
             </a:r>
             <a:br/>
             <a:r>
-              <a:t>どの列が動くかを</a:t>
+              <a:t>feature_map_shapeが</a:t>
             </a:r>
             <a:br/>
             <a:r>
-              <a:t>見る</a:t>
+              <a:t>どう変わるかを見る</a:t>
             </a:r>
           </a:p>
         </p:txBody>
@@ -6463,16 +6431,8 @@
           <a:bodyPr rtlCol="0" anchor="ctr" wrap="square" bIns="36576"/>
           <a:lstStyle/>
           <a:p>
-            <a:pPr algn="ctr">
-              <a:defRPr sz="1400" b="1">
-                <a:solidFill>
-                  <a:srgbClr val="24324B"/>
-                </a:solidFill>
-                <a:latin typeface="Yu Gothic"/>
-              </a:defRPr>
-            </a:pPr>
-            <a:r>
-              <a:t>局所的な特徴を特徴マップにする</a:t>
+            <a:r>
+              <a:t>paddingとstrideで窓の位置と出力サイズを調整する</a:t>
             </a:r>
           </a:p>
         </p:txBody>
@@ -6968,16 +6928,8 @@
           <a:bodyPr rtlCol="0" anchor="ctr" wrap="square" bIns="36576"/>
           <a:lstStyle/>
           <a:p>
-            <a:pPr algn="ctr">
-              <a:defRPr sz="1600" b="1">
-                <a:solidFill>
-                  <a:srgbClr val="24324B"/>
-                </a:solidFill>
-                <a:latin typeface="Yu Gothic"/>
-              </a:defRPr>
-            </a:pPr>
-            <a:r>
-              <a:t>小さくしているのは、式と表の対応を見失わないためです。</a:t>
+            <a:r>
+              <a:t>この回では小さな画像と2x2フィルタで、窓の位置と積和の対応に絞ります。</a:t>
             </a:r>
           </a:p>
         </p:txBody>
@@ -7315,16 +7267,8 @@
           </a:bodyPr>
           <a:lstStyle/>
           <a:p>
-            <a:pPr algn="ctr">
-              <a:defRPr sz="1800" b="1">
-                <a:solidFill>
-                  <a:srgbClr val="24324B"/>
-                </a:solidFill>
-                <a:latin typeface="Yu Gothic"/>
-              </a:defRPr>
-            </a:pPr>
-            <a:r>
-              <a:t>小さな画像行列から特徴マップを作る</a:t>
+            <a:r>
+              <a:t>paddingとstrideで特徴マップが変わることを見る</a:t>
             </a:r>
           </a:p>
         </p:txBody>
@@ -7449,16 +7393,28 @@
           </a:bodyPr>
           <a:lstStyle/>
           <a:p>
-            <a:pPr algn="l">
-              <a:defRPr sz="2500" b="1">
-                <a:solidFill>
-                  <a:srgbClr val="24324B"/>
-                </a:solidFill>
-                <a:latin typeface="Yu Gothic"/>
-              </a:defRPr>
-            </a:pPr>
             <a:r>
               <a:t>この回の用語</a:t>
+            </a:r>
+          </a:p>
+          <a:p>
+            <a:r>
+              <a:t>filter: 画像上を動かす小さな重み行列</a:t>
+            </a:r>
+          </a:p>
+          <a:p>
+            <a:r>
+              <a:t>padding: 画像の外側に0を足すこと</a:t>
+            </a:r>
+          </a:p>
+          <a:p>
+            <a:r>
+              <a:t>stride: フィルタを動かすマス数</a:t>
+            </a:r>
+          </a:p>
+          <a:p>
+            <a:r>
+              <a:t>feature map: 各窓の積和を並べた出力</a:t>
             </a:r>
           </a:p>
         </p:txBody>
@@ -8554,16 +8510,8 @@
           <a:bodyPr rtlCol="0" anchor="ctr" wrap="square" bIns="36576"/>
           <a:lstStyle/>
           <a:p>
-            <a:pPr algn="ctr">
-              <a:defRPr sz="1400" b="1">
-                <a:solidFill>
-                  <a:srgbClr val="24324B"/>
-                </a:solidFill>
-                <a:latin typeface="Yu Gothic"/>
-              </a:defRPr>
-            </a:pPr>
-            <a:r>
-              <a:t>小さな窓をずらしながら特徴を取り出す</a:t>
+            <a:r>
+              <a:t>窓の位置と出力サイズが変わる</a:t>
             </a:r>
           </a:p>
         </p:txBody>
@@ -8688,16 +8636,8 @@
           </a:bodyPr>
           <a:lstStyle/>
           <a:p>
-            <a:pPr algn="l">
-              <a:defRPr sz="2500" b="1">
-                <a:solidFill>
-                  <a:srgbClr val="24324B"/>
-                </a:solidFill>
-                <a:latin typeface="Yu Gothic"/>
-              </a:defRPr>
-            </a:pPr>
-            <a:r>
-              <a:t>小さな画像行列から特徴マップを作る</a:t>
+            <a:r>
+              <a:t>paddingとstrideで特徴マップが変わることを見る</a:t>
             </a:r>
           </a:p>
         </p:txBody>
@@ -8724,65 +8664,21 @@
           </a:bodyPr>
           <a:lstStyle/>
           <a:p>
-            <a:pPr>
-              <a:spcAft>
-                <a:spcPts val="800"/>
-              </a:spcAft>
-              <a:defRPr sz="1600">
-                <a:solidFill>
-                  <a:srgbClr val="24324B"/>
-                </a:solidFill>
-                <a:latin typeface="Yu Gothic"/>
-              </a:defRPr>
-            </a:pPr>
-            <a:r>
-              <a:t>• 小さな画像行列から特徴マップを作る</a:t>
-            </a:r>
-          </a:p>
-          <a:p>
-            <a:pPr>
-              <a:spcAft>
-                <a:spcPts val="800"/>
-              </a:spcAft>
-              <a:defRPr sz="1600">
-                <a:solidFill>
-                  <a:srgbClr val="24324B"/>
-                </a:solidFill>
-                <a:latin typeface="Yu Gothic"/>
-              </a:defRPr>
-            </a:pPr>
+            <a:r>
+              <a:t>• paddingとstrideで特徴マップが変わることを見る</a:t>
+            </a:r>
+          </a:p>
+          <a:p>
             <a:r>
               <a:t>• Excel上の値や設定を変更する</a:t>
             </a:r>
           </a:p>
           <a:p>
-            <a:pPr>
-              <a:spcAft>
-                <a:spcPts val="800"/>
-              </a:spcAft>
-              <a:defRPr sz="1600">
-                <a:solidFill>
-                  <a:srgbClr val="24324B"/>
-                </a:solidFill>
-                <a:latin typeface="Yu Gothic"/>
-              </a:defRPr>
-            </a:pPr>
             <a:r>
               <a:t>• PythonがWorkbookから読み直して計算する</a:t>
             </a:r>
           </a:p>
           <a:p>
-            <a:pPr>
-              <a:spcAft>
-                <a:spcPts val="800"/>
-              </a:spcAft>
-              <a:defRPr sz="1600">
-                <a:solidFill>
-                  <a:srgbClr val="24324B"/>
-                </a:solidFill>
-                <a:latin typeface="Yu Gothic"/>
-              </a:defRPr>
-            </a:pPr>
             <a:r>
               <a:t>• 返却表の列を見て変化を確認する</a:t>
             </a:r>
@@ -8830,21 +8726,13 @@
           <a:bodyPr rtlCol="0" anchor="ctr" wrap="square" bIns="36576"/>
           <a:lstStyle/>
           <a:p>
-            <a:pPr algn="ctr">
-              <a:defRPr sz="1100" b="1">
-                <a:solidFill>
-                  <a:srgbClr val="2F6690"/>
-                </a:solidFill>
-                <a:latin typeface="Yu Gothic"/>
-              </a:defRPr>
-            </a:pPr>
             <a:r>
               <a:t>CNNとは</a:t>
             </a:r>
             <a:br/>
             <a:br/>
             <a:r>
-              <a:t>CNNとは、画像の一部を小さなフィルタで見ながら、位置ごとの特徴を取り出すニューラルネットワークです。</a:t>
+              <a:t>CNNとは、画像の一部を小さなフィルタで見ながら、位置ごとの特徴を取り出すニューラルネットワークです。paddingは外側に余白を足し、strideはフィルタを動かす幅を決めます。</a:t>
             </a:r>
           </a:p>
         </p:txBody>
@@ -8890,25 +8778,17 @@
           <a:bodyPr rtlCol="0" anchor="ctr" wrap="square" bIns="36576"/>
           <a:lstStyle/>
           <a:p>
-            <a:pPr algn="ctr">
-              <a:defRPr sz="1500" b="1">
-                <a:solidFill>
-                  <a:srgbClr val="276749"/>
-                </a:solidFill>
-                <a:latin typeface="Yu Gothic"/>
-              </a:defRPr>
-            </a:pPr>
             <a:r>
               <a:t>見える変化</a:t>
             </a:r>
             <a:br/>
             <a:br/>
             <a:r>
-              <a:t>画像行列</a:t>
+              <a:t>padding / stride</a:t>
             </a:r>
             <a:br/>
             <a:r>
-              <a:t>window</a:t>
+              <a:t>feature_map_shape</a:t>
             </a:r>
           </a:p>
         </p:txBody>
@@ -10509,16 +10389,8 @@
           <a:bodyPr rtlCol="0" anchor="ctr" wrap="square" bIns="36576"/>
           <a:lstStyle/>
           <a:p>
-            <a:pPr algn="ctr">
-              <a:defRPr sz="1400" b="1">
-                <a:solidFill>
-                  <a:srgbClr val="276749"/>
-                </a:solidFill>
-                <a:latin typeface="Yu Gothic"/>
-              </a:defRPr>
-            </a:pPr>
-            <a:r>
-              <a:t>小さな窓をずらしながら特徴を取り出す</a:t>
+            <a:r>
+              <a:t>窓の位置と出力サイズが変わる</a:t>
             </a:r>
           </a:p>
         </p:txBody>
@@ -11684,16 +11556,8 @@
           <a:bodyPr rtlCol="0" anchor="ctr" wrap="square" bIns="36576"/>
           <a:lstStyle/>
           <a:p>
-            <a:pPr algn="ctr">
-              <a:defRPr sz="1500" b="1">
-                <a:solidFill>
-                  <a:srgbClr val="24324B"/>
-                </a:solidFill>
-                <a:latin typeface="Yu Gothic"/>
-              </a:defRPr>
-            </a:pPr>
-            <a:r>
-              <a:t>Excelで変更した値が、そのままPythonの計算結果に反映されます。</a:t>
+            <a:r>
+              <a:t>paddingやstrideを変えると、Pythonが作る特徴マップの形と値が変わります。</a:t>
             </a:r>
           </a:p>
         </p:txBody>
@@ -11818,16 +11682,8 @@
           </a:bodyPr>
           <a:lstStyle/>
           <a:p>
-            <a:pPr algn="l">
-              <a:defRPr sz="2500" b="1">
-                <a:solidFill>
-                  <a:srgbClr val="24324B"/>
-                </a:solidFill>
-                <a:latin typeface="Yu Gothic"/>
-              </a:defRPr>
-            </a:pPr>
-            <a:r>
-              <a:t>どこを変えると、どの表が変わるか</a:t>
+            <a:r>
+              <a:t>どこを変えると、窓と特徴マップが変わるか</a:t>
             </a:r>
           </a:p>
         </p:txBody>
@@ -12196,16 +12052,8 @@
           <a:bodyPr rtlCol="0" anchor="ctr" wrap="square" bIns="36576"/>
           <a:lstStyle/>
           <a:p>
-            <a:pPr algn="ctr">
-              <a:defRPr sz="1500" b="1">
-                <a:solidFill>
-                  <a:srgbClr val="276749"/>
-                </a:solidFill>
-                <a:latin typeface="Yu Gothic"/>
-              </a:defRPr>
-            </a:pPr>
-            <a:r>
-              <a:t>操作の目的は、値を変えた時の表の変化を読むことです。</a:t>
+            <a:r>
+              <a:t>strideで窓の移動幅を変え、paddingで端の扱いを変えた時の差を読みます。</a:t>
             </a:r>
           </a:p>
         </p:txBody>
@@ -13483,20 +13331,12 @@
           <a:bodyPr rtlCol="0" anchor="ctr" wrap="square" bIns="36576"/>
           <a:lstStyle/>
           <a:p>
-            <a:pPr algn="ctr">
-              <a:defRPr sz="1800" b="1">
-                <a:solidFill>
-                  <a:srgbClr val="276749"/>
-                </a:solidFill>
-                <a:latin typeface="Yu Gothic"/>
-              </a:defRPr>
-            </a:pPr>
-            <a:r>
-              <a:t>初期値の</a:t>
+            <a:r>
+              <a:t>feature_mapを</a:t>
             </a:r>
             <a:br/>
             <a:r>
-              <a:t>結果を読む</a:t>
+              <a:t>読む</a:t>
             </a:r>
           </a:p>
         </p:txBody>
